--- a/output/education/2026-03-30_palliative-home-death-concordance/palliative-home-death-concordance_slides_residents.pptx
+++ b/output/education/2026-03-30_palliative-home-death-concordance/palliative-home-death-concordance_slides_residents.pptx
@@ -3384,42 +3384,6 @@
           </a:p>
         </p:txBody>
       </p:sp>
-      <p:sp>
-        <p:nvSpPr>
-          <p:cNvPr id="9" name="TextBox 8"/>
-          <p:cNvSpPr txBox="1"/>
-          <p:nvPr/>
-        </p:nvSpPr>
-        <p:spPr>
-          <a:xfrm>
-            <a:off x="6400800" y="4663440"/>
-            <a:ext cx="2743200" cy="274320"/>
-          </a:xfrm>
-          <a:prstGeom prst="rect">
-            <a:avLst/>
-          </a:prstGeom>
-          <a:noFill/>
-        </p:spPr>
-        <p:txBody>
-          <a:bodyPr wrap="square" lIns="45720" rIns="45720" tIns="27432" bIns="27432">
-            <a:spAutoFit/>
-          </a:bodyPr>
-          <a:lstStyle/>
-          <a:p>
-            <a:pPr algn="l">
-              <a:defRPr sz="800" b="0">
-                <a:solidFill>
-                  <a:srgbClr val="7A8A9A"/>
-                </a:solidFill>
-                <a:latin typeface="Calibri"/>
-              </a:defRPr>
-            </a:pPr>
-            <a:r>
-              <a:t>[ガニェ事象1: 注意の獲得]</a:t>
-            </a:r>
-          </a:p>
-        </p:txBody>
-      </p:sp>
     </p:spTree>
   </p:cSld>
   <p:clrMapOvr>
@@ -3958,42 +3922,6 @@
           </a:p>
         </p:txBody>
       </p:sp>
-      <p:sp>
-        <p:nvSpPr>
-          <p:cNvPr id="15" name="TextBox 14"/>
-          <p:cNvSpPr txBox="1"/>
-          <p:nvPr/>
-        </p:nvSpPr>
-        <p:spPr>
-          <a:xfrm>
-            <a:off x="4572000" y="4663440"/>
-            <a:ext cx="4572000" cy="274320"/>
-          </a:xfrm>
-          <a:prstGeom prst="rect">
-            <a:avLst/>
-          </a:prstGeom>
-          <a:noFill/>
-        </p:spPr>
-        <p:txBody>
-          <a:bodyPr wrap="square" lIns="45720" rIns="45720" tIns="27432" bIns="27432">
-            <a:spAutoFit/>
-          </a:bodyPr>
-          <a:lstStyle/>
-          <a:p>
-            <a:pPr algn="l">
-              <a:defRPr sz="800" b="0">
-                <a:solidFill>
-                  <a:srgbClr val="7A8A9A"/>
-                </a:solidFill>
-                <a:latin typeface="Calibri"/>
-              </a:defRPr>
-            </a:pPr>
-            <a:r>
-              <a:t>[ガニェ事象8: 学習成果の評価 / 事象9: 保持と転移]</a:t>
-            </a:r>
-          </a:p>
-        </p:txBody>
-      </p:sp>
     </p:spTree>
   </p:cSld>
   <p:clrMapOvr>
@@ -4488,42 +4416,6 @@
             </a:pPr>
             <a:r>
               <a:t>ブルーム分類: 理解 → 分析 → 創造</a:t>
-            </a:r>
-          </a:p>
-        </p:txBody>
-      </p:sp>
-      <p:sp>
-        <p:nvSpPr>
-          <p:cNvPr id="14" name="TextBox 13"/>
-          <p:cNvSpPr txBox="1"/>
-          <p:nvPr/>
-        </p:nvSpPr>
-        <p:spPr>
-          <a:xfrm>
-            <a:off x="6400800" y="4663440"/>
-            <a:ext cx="2743200" cy="274320"/>
-          </a:xfrm>
-          <a:prstGeom prst="rect">
-            <a:avLst/>
-          </a:prstGeom>
-          <a:noFill/>
-        </p:spPr>
-        <p:txBody>
-          <a:bodyPr wrap="square" lIns="45720" rIns="45720" tIns="27432" bIns="27432">
-            <a:spAutoFit/>
-          </a:bodyPr>
-          <a:lstStyle/>
-          <a:p>
-            <a:pPr algn="l">
-              <a:defRPr sz="800" b="0">
-                <a:solidFill>
-                  <a:srgbClr val="7A8A9A"/>
-                </a:solidFill>
-                <a:latin typeface="Calibri"/>
-              </a:defRPr>
-            </a:pPr>
-            <a:r>
-              <a:t>[ガニェ事象2: 学習目標の提示]</a:t>
             </a:r>
           </a:p>
         </p:txBody>
@@ -5102,42 +4994,6 @@
             </a:pPr>
             <a:r>
               <a:t>ACPは「紙に書くこと」ではなく「対話のプロセス」——2018年「人生会議」啓発以降、認知は向上したが実践の質にばらつきあり</a:t>
-            </a:r>
-          </a:p>
-        </p:txBody>
-      </p:sp>
-      <p:sp>
-        <p:nvSpPr>
-          <p:cNvPr id="8" name="TextBox 7"/>
-          <p:cNvSpPr txBox="1"/>
-          <p:nvPr/>
-        </p:nvSpPr>
-        <p:spPr>
-          <a:xfrm>
-            <a:off x="6400800" y="4663440"/>
-            <a:ext cx="2743200" cy="274320"/>
-          </a:xfrm>
-          <a:prstGeom prst="rect">
-            <a:avLst/>
-          </a:prstGeom>
-          <a:noFill/>
-        </p:spPr>
-        <p:txBody>
-          <a:bodyPr wrap="square" lIns="45720" rIns="45720" tIns="27432" bIns="27432">
-            <a:spAutoFit/>
-          </a:bodyPr>
-          <a:lstStyle/>
-          <a:p>
-            <a:pPr algn="l">
-              <a:defRPr sz="800" b="0">
-                <a:solidFill>
-                  <a:srgbClr val="7A8A9A"/>
-                </a:solidFill>
-                <a:latin typeface="Calibri"/>
-              </a:defRPr>
-            </a:pPr>
-            <a:r>
-              <a:t>[ガニェ事象3: 前提条件の確認]</a:t>
             </a:r>
           </a:p>
         </p:txBody>
@@ -5659,42 +5515,6 @@
           </a:p>
         </p:txBody>
       </p:sp>
-      <p:sp>
-        <p:nvSpPr>
-          <p:cNvPr id="6" name="TextBox 5"/>
-          <p:cNvSpPr txBox="1"/>
-          <p:nvPr/>
-        </p:nvSpPr>
-        <p:spPr>
-          <a:xfrm>
-            <a:off x="6400800" y="4663440"/>
-            <a:ext cx="2743200" cy="274320"/>
-          </a:xfrm>
-          <a:prstGeom prst="rect">
-            <a:avLst/>
-          </a:prstGeom>
-          <a:noFill/>
-        </p:spPr>
-        <p:txBody>
-          <a:bodyPr wrap="square" lIns="45720" rIns="45720" tIns="27432" bIns="27432">
-            <a:spAutoFit/>
-          </a:bodyPr>
-          <a:lstStyle/>
-          <a:p>
-            <a:pPr algn="l">
-              <a:defRPr sz="800" b="0">
-                <a:solidFill>
-                  <a:srgbClr val="7A8A9A"/>
-                </a:solidFill>
-                <a:latin typeface="Calibri"/>
-              </a:defRPr>
-            </a:pPr>
-            <a:r>
-              <a:t>[ガニェ事象4: 新しい内容の提示]</a:t>
-            </a:r>
-          </a:p>
-        </p:txBody>
-      </p:sp>
     </p:spTree>
   </p:cSld>
   <p:clrMapOvr>
@@ -6230,42 +6050,6 @@
             <a:br/>
             <a:r>
               <a:t>最も手厚い支援を受けた集団での数値であることに注目。</a:t>
-            </a:r>
-          </a:p>
-        </p:txBody>
-      </p:sp>
-      <p:sp>
-        <p:nvSpPr>
-          <p:cNvPr id="15" name="TextBox 14"/>
-          <p:cNvSpPr txBox="1"/>
-          <p:nvPr/>
-        </p:nvSpPr>
-        <p:spPr>
-          <a:xfrm>
-            <a:off x="6400800" y="4663440"/>
-            <a:ext cx="2743200" cy="274320"/>
-          </a:xfrm>
-          <a:prstGeom prst="rect">
-            <a:avLst/>
-          </a:prstGeom>
-          <a:noFill/>
-        </p:spPr>
-        <p:txBody>
-          <a:bodyPr wrap="square" lIns="45720" rIns="45720" tIns="27432" bIns="27432">
-            <a:spAutoFit/>
-          </a:bodyPr>
-          <a:lstStyle/>
-          <a:p>
-            <a:pPr algn="l">
-              <a:defRPr sz="800" b="0">
-                <a:solidFill>
-                  <a:srgbClr val="7A8A9A"/>
-                </a:solidFill>
-                <a:latin typeface="Calibri"/>
-              </a:defRPr>
-            </a:pPr>
-            <a:r>
-              <a:t>[ガニェ事象4: 新しい内容の提示（続）]</a:t>
             </a:r>
           </a:p>
         </p:txBody>
@@ -6854,7 +6638,7 @@
         </p:nvSpPr>
         <p:spPr>
           <a:xfrm>
-            <a:off x="457200" y="3657600"/>
+            <a:off x="457200" y="4023360"/>
             <a:ext cx="54864" cy="731520"/>
           </a:xfrm>
           <a:prstGeom prst="rect">
@@ -6897,7 +6681,7 @@
         </p:nvSpPr>
         <p:spPr>
           <a:xfrm>
-            <a:off x="566928" y="3657600"/>
+            <a:off x="566928" y="4023360"/>
             <a:ext cx="8119872" cy="731520"/>
           </a:xfrm>
           <a:prstGeom prst="rect">
@@ -6942,7 +6726,7 @@
         </p:nvSpPr>
         <p:spPr>
           <a:xfrm>
-            <a:off x="685800" y="3730752"/>
+            <a:off x="685800" y="4096512"/>
             <a:ext cx="7863840" cy="585216"/>
           </a:xfrm>
           <a:prstGeom prst="rect">
@@ -6970,42 +6754,6 @@
             <a:br/>
             <a:r>
               <a:t>一般的な在宅療養患者ではさらに高い不一致率が想定される。</a:t>
-            </a:r>
-          </a:p>
-        </p:txBody>
-      </p:sp>
-      <p:sp>
-        <p:nvSpPr>
-          <p:cNvPr id="8" name="TextBox 7"/>
-          <p:cNvSpPr txBox="1"/>
-          <p:nvPr/>
-        </p:nvSpPr>
-        <p:spPr>
-          <a:xfrm>
-            <a:off x="6400800" y="4663440"/>
-            <a:ext cx="2743200" cy="274320"/>
-          </a:xfrm>
-          <a:prstGeom prst="rect">
-            <a:avLst/>
-          </a:prstGeom>
-          <a:noFill/>
-        </p:spPr>
-        <p:txBody>
-          <a:bodyPr wrap="square" lIns="45720" rIns="45720" tIns="27432" bIns="27432">
-            <a:spAutoFit/>
-          </a:bodyPr>
-          <a:lstStyle/>
-          <a:p>
-            <a:pPr algn="l">
-              <a:defRPr sz="800" b="0">
-                <a:solidFill>
-                  <a:srgbClr val="7A8A9A"/>
-                </a:solidFill>
-                <a:latin typeface="Calibri"/>
-              </a:defRPr>
-            </a:pPr>
-            <a:r>
-              <a:t>[ガニェ事象4: 新しい内容の提示（続）]</a:t>
             </a:r>
           </a:p>
         </p:txBody>
@@ -7740,42 +7488,6 @@
           </a:p>
         </p:txBody>
       </p:sp>
-      <p:sp>
-        <p:nvSpPr>
-          <p:cNvPr id="19" name="TextBox 18"/>
-          <p:cNvSpPr txBox="1"/>
-          <p:nvPr/>
-        </p:nvSpPr>
-        <p:spPr>
-          <a:xfrm>
-            <a:off x="6400800" y="4663440"/>
-            <a:ext cx="2743200" cy="274320"/>
-          </a:xfrm>
-          <a:prstGeom prst="rect">
-            <a:avLst/>
-          </a:prstGeom>
-          <a:noFill/>
-        </p:spPr>
-        <p:txBody>
-          <a:bodyPr wrap="square" lIns="45720" rIns="45720" tIns="27432" bIns="27432">
-            <a:spAutoFit/>
-          </a:bodyPr>
-          <a:lstStyle/>
-          <a:p>
-            <a:pPr algn="l">
-              <a:defRPr sz="800" b="0">
-                <a:solidFill>
-                  <a:srgbClr val="7A8A9A"/>
-                </a:solidFill>
-                <a:latin typeface="Calibri"/>
-              </a:defRPr>
-            </a:pPr>
-            <a:r>
-              <a:t>[ガニェ事象5: 学習の案内]</a:t>
-            </a:r>
-          </a:p>
-        </p:txBody>
-      </p:sp>
     </p:spTree>
   </p:cSld>
   <p:clrMapOvr>
@@ -8108,42 +7820,6 @@
             </a:pPr>
             <a:r>
               <a:t>3. 家族（妻）にどのような事前準備ができたか？</a:t>
-            </a:r>
-          </a:p>
-        </p:txBody>
-      </p:sp>
-      <p:sp>
-        <p:nvSpPr>
-          <p:cNvPr id="10" name="TextBox 9"/>
-          <p:cNvSpPr txBox="1"/>
-          <p:nvPr/>
-        </p:nvSpPr>
-        <p:spPr>
-          <a:xfrm>
-            <a:off x="5029200" y="4663440"/>
-            <a:ext cx="4114800" cy="274320"/>
-          </a:xfrm>
-          <a:prstGeom prst="rect">
-            <a:avLst/>
-          </a:prstGeom>
-          <a:noFill/>
-        </p:spPr>
-        <p:txBody>
-          <a:bodyPr wrap="square" lIns="45720" rIns="45720" tIns="27432" bIns="27432">
-            <a:spAutoFit/>
-          </a:bodyPr>
-          <a:lstStyle/>
-          <a:p>
-            <a:pPr algn="l">
-              <a:defRPr sz="800" b="0">
-                <a:solidFill>
-                  <a:srgbClr val="7A8A9A"/>
-                </a:solidFill>
-                <a:latin typeface="Calibri"/>
-              </a:defRPr>
-            </a:pPr>
-            <a:r>
-              <a:t>[ガニェ事象6: 練習の実施 / 事象7: フィードバック]</a:t>
             </a:r>
           </a:p>
         </p:txBody>
@@ -8774,42 +8450,6 @@
           </a:p>
         </p:txBody>
       </p:sp>
-      <p:sp>
-        <p:nvSpPr>
-          <p:cNvPr id="8" name="TextBox 7"/>
-          <p:cNvSpPr txBox="1"/>
-          <p:nvPr/>
-        </p:nvSpPr>
-        <p:spPr>
-          <a:xfrm>
-            <a:off x="6400800" y="4663440"/>
-            <a:ext cx="2743200" cy="274320"/>
-          </a:xfrm>
-          <a:prstGeom prst="rect">
-            <a:avLst/>
-          </a:prstGeom>
-          <a:noFill/>
-        </p:spPr>
-        <p:txBody>
-          <a:bodyPr wrap="square" lIns="45720" rIns="45720" tIns="27432" bIns="27432">
-            <a:spAutoFit/>
-          </a:bodyPr>
-          <a:lstStyle/>
-          <a:p>
-            <a:pPr algn="l">
-              <a:defRPr sz="800" b="0">
-                <a:solidFill>
-                  <a:srgbClr val="7A8A9A"/>
-                </a:solidFill>
-                <a:latin typeface="Calibri"/>
-              </a:defRPr>
-            </a:pPr>
-            <a:r>
-              <a:t>[ガニェ事象6: 練習の実施（続）]</a:t>
-            </a:r>
-          </a:p>
-        </p:txBody>
-      </p:sp>
     </p:spTree>
   </p:cSld>
   <p:clrMapOvr>

--- a/output/education/2026-03-30_palliative-home-death-concordance/palliative-home-death-concordance_slides_residents.pptx
+++ b/output/education/2026-03-30_palliative-home-death-concordance/palliative-home-death-concordance_slides_residents.pptx
@@ -3136,10 +3136,12 @@
               </a:defRPr>
             </a:pPr>
             <a:r>
+              <a:rPr/>
               <a:t>5人に1人は、</a:t>
             </a:r>
             <a:br/>
             <a:r>
+              <a:rPr/>
               <a:t>希望と違う場所で亡くなっている</a:t>
             </a:r>
           </a:p>
@@ -3184,7 +3186,9 @@
           <a:bodyPr rtlCol="0" anchor="ctr"/>
           <a:lstStyle/>
           <a:p>
-            <a:pPr algn="ctr"/>
+            <a:pPr algn="ctr">
+              <a:defRPr/>
+            </a:pPr>
           </a:p>
         </p:txBody>
       </p:sp>
@@ -3197,7 +3201,7 @@
         <p:spPr>
           <a:xfrm>
             <a:off x="3200400" y="2011680"/>
-            <a:ext cx="2743200" cy="1097280"/>
+            <a:ext cx="2743200" cy="1158240"/>
           </a:xfrm>
           <a:prstGeom prst="rect">
             <a:avLst/>
@@ -3219,6 +3223,7 @@
               </a:defRPr>
             </a:pPr>
             <a:r>
+              <a:rPr/>
               <a:t>20%</a:t>
             </a:r>
           </a:p>
@@ -3255,6 +3260,7 @@
               </a:defRPr>
             </a:pPr>
             <a:r>
+              <a:rPr/>
               <a:t>緩和ケア病棟を経由した患者 — 最も手厚い支援を受けた集団においてさえ</a:t>
             </a:r>
           </a:p>
@@ -3299,7 +3305,9 @@
           <a:bodyPr rtlCol="0" anchor="ctr"/>
           <a:lstStyle/>
           <a:p>
-            <a:pPr algn="ctr"/>
+            <a:pPr algn="ctr">
+              <a:defRPr/>
+            </a:pPr>
           </a:p>
         </p:txBody>
       </p:sp>
@@ -3344,7 +3352,9 @@
           <a:bodyPr rtlCol="0" anchor="ctr"/>
           <a:lstStyle/>
           <a:p>
-            <a:pPr algn="ctr"/>
+            <a:pPr algn="ctr">
+              <a:defRPr/>
+            </a:pPr>
           </a:p>
         </p:txBody>
       </p:sp>
@@ -3379,6 +3389,7 @@
               </a:defRPr>
             </a:pPr>
             <a:r>
+              <a:rPr/>
               <a:t>あなたが担当した患者さんは、希望通りの場所で最期を迎えられましたか？</a:t>
             </a:r>
           </a:p>
@@ -3441,6 +3452,7 @@
               </a:defRPr>
             </a:pPr>
             <a:r>
+              <a:rPr/>
               <a:t>振り返りと、明日からの臨床への問い</a:t>
             </a:r>
           </a:p>
@@ -3485,7 +3497,9 @@
           <a:bodyPr rtlCol="0" anchor="ctr"/>
           <a:lstStyle/>
           <a:p>
-            <a:pPr algn="ctr"/>
+            <a:pPr algn="ctr">
+              <a:defRPr/>
+            </a:pPr>
           </a:p>
         </p:txBody>
       </p:sp>
@@ -3528,7 +3542,9 @@
           <a:bodyPr rtlCol="0" anchor="ctr"/>
           <a:lstStyle/>
           <a:p>
-            <a:pPr algn="ctr"/>
+            <a:pPr algn="ctr">
+              <a:defRPr/>
+            </a:pPr>
           </a:p>
         </p:txBody>
       </p:sp>
@@ -3563,6 +3579,7 @@
               </a:defRPr>
             </a:pPr>
             <a:r>
+              <a:rPr/>
               <a:t>1</a:t>
             </a:r>
           </a:p>
@@ -3599,10 +3616,12 @@
               </a:defRPr>
             </a:pPr>
             <a:r>
+              <a:rPr/>
               <a:t>一致率80-82%は国際的に上位だが、</a:t>
             </a:r>
             <a:br/>
             <a:r>
+              <a:rPr/>
               <a:t>「5人に1人」の不一致は構造的課題が原因</a:t>
             </a:r>
           </a:p>
@@ -3647,7 +3666,9 @@
           <a:bodyPr rtlCol="0" anchor="ctr"/>
           <a:lstStyle/>
           <a:p>
-            <a:pPr algn="ctr"/>
+            <a:pPr algn="ctr">
+              <a:defRPr/>
+            </a:pPr>
           </a:p>
         </p:txBody>
       </p:sp>
@@ -3682,6 +3703,7 @@
               </a:defRPr>
             </a:pPr>
             <a:r>
+              <a:rPr/>
               <a:t>2</a:t>
             </a:r>
           </a:p>
@@ -3718,10 +3740,12 @@
               </a:defRPr>
             </a:pPr>
             <a:r>
+              <a:rPr/>
               <a:t>不一致は「医師偏在」「痛み管理格差」</a:t>
             </a:r>
             <a:br/>
             <a:r>
+              <a:rPr/>
               <a:t>「教育格差」の3層で生じている</a:t>
             </a:r>
           </a:p>
@@ -3766,7 +3790,9 @@
           <a:bodyPr rtlCol="0" anchor="ctr"/>
           <a:lstStyle/>
           <a:p>
-            <a:pPr algn="ctr"/>
+            <a:pPr algn="ctr">
+              <a:defRPr/>
+            </a:pPr>
           </a:p>
         </p:txBody>
       </p:sp>
@@ -3801,6 +3827,7 @@
               </a:defRPr>
             </a:pPr>
             <a:r>
+              <a:rPr/>
               <a:t>3</a:t>
             </a:r>
           </a:p>
@@ -3837,10 +3864,12 @@
               </a:defRPr>
             </a:pPr>
             <a:r>
+              <a:rPr/>
               <a:t>ACPは「紙の文書」ではなく</a:t>
             </a:r>
             <a:br/>
             <a:r>
+              <a:rPr/>
               <a:t>「繰り返しの対話プロセス」として機能させる</a:t>
             </a:r>
           </a:p>
@@ -3877,6 +3906,7 @@
               </a:defRPr>
             </a:pPr>
             <a:r>
+              <a:rPr/>
               <a:t>持ち帰りの問い</a:t>
             </a:r>
           </a:p>
@@ -3913,10 +3943,12 @@
               </a:defRPr>
             </a:pPr>
             <a:r>
+              <a:rPr/>
               <a:t>「あなたの診療圏で、在宅看取りを阻んでいる最大の構造的障壁は何ですか？」</a:t>
             </a:r>
             <a:br/>
             <a:r>
+              <a:rPr/>
               <a:t>「次に看取りに関わるとき、ACPの再確認をどのタイミングで行いますか？」</a:t>
             </a:r>
           </a:p>
@@ -3957,7 +3989,7 @@
         <p:spPr>
           <a:xfrm>
             <a:off x="457200" y="274320"/>
-            <a:ext cx="8229600" cy="457200"/>
+            <a:ext cx="8229600" cy="482600"/>
           </a:xfrm>
           <a:prstGeom prst="rect">
             <a:avLst/>
@@ -3979,6 +4011,7 @@
               </a:defRPr>
             </a:pPr>
             <a:r>
+              <a:rPr/>
               <a:t>今日の学習目標</a:t>
             </a:r>
           </a:p>
@@ -4023,7 +4056,9 @@
           <a:bodyPr rtlCol="0" anchor="ctr"/>
           <a:lstStyle/>
           <a:p>
-            <a:pPr algn="ctr"/>
+            <a:pPr algn="ctr">
+              <a:defRPr/>
+            </a:pPr>
           </a:p>
         </p:txBody>
       </p:sp>
@@ -4066,7 +4101,9 @@
           <a:bodyPr rtlCol="0" anchor="ctr"/>
           <a:lstStyle/>
           <a:p>
-            <a:pPr algn="ctr"/>
+            <a:pPr algn="ctr">
+              <a:defRPr/>
+            </a:pPr>
           </a:p>
         </p:txBody>
       </p:sp>
@@ -4101,6 +4138,7 @@
               </a:defRPr>
             </a:pPr>
             <a:r>
+              <a:rPr/>
               <a:t>解釈（理解）</a:t>
             </a:r>
           </a:p>
@@ -4137,10 +4175,12 @@
               </a:defRPr>
             </a:pPr>
             <a:r>
+              <a:rPr/>
               <a:t>ACPの看取り場所一致率データを</a:t>
             </a:r>
             <a:br/>
             <a:r>
+              <a:rPr/>
               <a:t>国際比較の中で解釈できる</a:t>
             </a:r>
           </a:p>
@@ -4185,7 +4225,9 @@
           <a:bodyPr rtlCol="0" anchor="ctr"/>
           <a:lstStyle/>
           <a:p>
-            <a:pPr algn="ctr"/>
+            <a:pPr algn="ctr">
+              <a:defRPr/>
+            </a:pPr>
           </a:p>
         </p:txBody>
       </p:sp>
@@ -4220,6 +4262,7 @@
               </a:defRPr>
             </a:pPr>
             <a:r>
+              <a:rPr/>
               <a:t>分析</a:t>
             </a:r>
           </a:p>
@@ -4256,10 +4299,12 @@
               </a:defRPr>
             </a:pPr>
             <a:r>
+              <a:rPr/>
               <a:t>不一致が生じる構造的要因を3つ以上挙げ、</a:t>
             </a:r>
             <a:br/>
             <a:r>
+              <a:rPr/>
               <a:t>因果関係を分析できる</a:t>
             </a:r>
           </a:p>
@@ -4304,7 +4349,9 @@
           <a:bodyPr rtlCol="0" anchor="ctr"/>
           <a:lstStyle/>
           <a:p>
-            <a:pPr algn="ctr"/>
+            <a:pPr algn="ctr">
+              <a:defRPr/>
+            </a:pPr>
           </a:p>
         </p:txBody>
       </p:sp>
@@ -4339,6 +4386,7 @@
               </a:defRPr>
             </a:pPr>
             <a:r>
+              <a:rPr/>
               <a:t>創造</a:t>
             </a:r>
           </a:p>
@@ -4375,10 +4423,12 @@
               </a:defRPr>
             </a:pPr>
             <a:r>
+              <a:rPr/>
               <a:t>在宅看取りの意思決定支援計画を</a:t>
             </a:r>
             <a:br/>
             <a:r>
+              <a:rPr/>
               <a:t>自分の臨床に合わせて立案できる</a:t>
             </a:r>
           </a:p>
@@ -4415,6 +4465,7 @@
               </a:defRPr>
             </a:pPr>
             <a:r>
+              <a:rPr/>
               <a:t>ブルーム分類: 理解 → 分析 → 創造</a:t>
             </a:r>
           </a:p>
@@ -4477,6 +4528,7 @@
               </a:defRPr>
             </a:pPr>
             <a:r>
+              <a:rPr/>
               <a:t>ACP（アドバンス・ケア・プランニング）の基本概念</a:t>
             </a:r>
           </a:p>
@@ -4521,7 +4573,9 @@
           <a:bodyPr rtlCol="0" anchor="ctr"/>
           <a:lstStyle/>
           <a:p>
-            <a:pPr algn="ctr"/>
+            <a:pPr algn="ctr">
+              <a:defRPr/>
+            </a:pPr>
           </a:p>
         </p:txBody>
       </p:sp>
@@ -4913,7 +4967,9 @@
           <a:bodyPr rtlCol="0" anchor="ctr"/>
           <a:lstStyle/>
           <a:p>
-            <a:pPr algn="ctr"/>
+            <a:pPr algn="ctr">
+              <a:defRPr/>
+            </a:pPr>
           </a:p>
         </p:txBody>
       </p:sp>
@@ -4958,7 +5014,9 @@
           <a:bodyPr rtlCol="0" anchor="ctr"/>
           <a:lstStyle/>
           <a:p>
-            <a:pPr algn="ctr"/>
+            <a:pPr algn="ctr">
+              <a:defRPr/>
+            </a:pPr>
           </a:p>
         </p:txBody>
       </p:sp>
@@ -4993,6 +5051,7 @@
               </a:defRPr>
             </a:pPr>
             <a:r>
+              <a:rPr/>
               <a:t>ACPは「紙に書くこと」ではなく「対話のプロセス」——2018年「人生会議」啓発以降、認知は向上したが実践の質にばらつきあり</a:t>
             </a:r>
           </a:p>
@@ -5033,7 +5092,7 @@
         <p:spPr>
           <a:xfrm>
             <a:off x="457200" y="274320"/>
-            <a:ext cx="8229600" cy="457200"/>
+            <a:ext cx="8229600" cy="482600"/>
           </a:xfrm>
           <a:prstGeom prst="rect">
             <a:avLst/>
@@ -5055,6 +5114,7 @@
               </a:defRPr>
             </a:pPr>
             <a:r>
+              <a:rPr/>
               <a:t>本研究のデザインと対象</a:t>
             </a:r>
           </a:p>
@@ -5099,7 +5159,9 @@
           <a:bodyPr rtlCol="0" anchor="ctr"/>
           <a:lstStyle/>
           <a:p>
-            <a:pPr algn="ctr"/>
+            <a:pPr algn="ctr">
+              <a:defRPr/>
+            </a:pPr>
           </a:p>
         </p:txBody>
       </p:sp>
@@ -5510,6 +5572,7 @@
               </a:defRPr>
             </a:pPr>
             <a:r>
+              <a:rPr/>
               <a:t>メソドロジーの限界: 想起バイアス・生存者バイアス・選択バイアスに留意</a:t>
             </a:r>
           </a:p>
@@ -5550,7 +5613,7 @@
         <p:spPr>
           <a:xfrm>
             <a:off x="457200" y="274320"/>
-            <a:ext cx="8229600" cy="457200"/>
+            <a:ext cx="8229600" cy="482600"/>
           </a:xfrm>
           <a:prstGeom prst="rect">
             <a:avLst/>
@@ -5572,6 +5635,7 @@
               </a:defRPr>
             </a:pPr>
             <a:r>
+              <a:rPr/>
               <a:t>一致率 80-82% — この数字をどう読むか</a:t>
             </a:r>
           </a:p>
@@ -5616,7 +5680,9 @@
           <a:bodyPr rtlCol="0" anchor="ctr"/>
           <a:lstStyle/>
           <a:p>
-            <a:pPr algn="ctr"/>
+            <a:pPr algn="ctr">
+              <a:defRPr/>
+            </a:pPr>
           </a:p>
         </p:txBody>
       </p:sp>
@@ -5661,7 +5727,9 @@
           <a:bodyPr rtlCol="0" anchor="ctr"/>
           <a:lstStyle/>
           <a:p>
-            <a:pPr algn="ctr"/>
+            <a:pPr algn="ctr">
+              <a:defRPr/>
+            </a:pPr>
           </a:p>
         </p:txBody>
       </p:sp>
@@ -5696,6 +5764,7 @@
               </a:defRPr>
             </a:pPr>
             <a:r>
+              <a:rPr/>
               <a:t>自宅死亡</a:t>
             </a:r>
           </a:p>
@@ -5732,6 +5801,7 @@
               </a:defRPr>
             </a:pPr>
             <a:r>
+              <a:rPr/>
               <a:t>80%</a:t>
             </a:r>
           </a:p>
@@ -5745,7 +5815,7 @@
         </p:nvSpPr>
         <p:spPr>
           <a:xfrm>
-            <a:off x="731520" y="2468880"/>
+            <a:off x="731520" y="2578608"/>
             <a:ext cx="3657600" cy="274320"/>
           </a:xfrm>
           <a:prstGeom prst="rect">
@@ -5768,6 +5838,7 @@
               </a:defRPr>
             </a:pPr>
             <a:r>
+              <a:rPr/>
               <a:t>n=202</a:t>
             </a:r>
           </a:p>
@@ -5814,7 +5885,9 @@
           <a:bodyPr rtlCol="0" anchor="ctr"/>
           <a:lstStyle/>
           <a:p>
-            <a:pPr algn="ctr"/>
+            <a:pPr algn="ctr">
+              <a:defRPr/>
+            </a:pPr>
           </a:p>
         </p:txBody>
       </p:sp>
@@ -5849,6 +5922,7 @@
               </a:defRPr>
             </a:pPr>
             <a:r>
+              <a:rPr/>
               <a:t>緩和ケア病棟死亡</a:t>
             </a:r>
           </a:p>
@@ -5885,6 +5959,7 @@
               </a:defRPr>
             </a:pPr>
             <a:r>
+              <a:rPr/>
               <a:t>82%</a:t>
             </a:r>
           </a:p>
@@ -5898,7 +5973,7 @@
         </p:nvSpPr>
         <p:spPr>
           <a:xfrm>
-            <a:off x="4754880" y="2468880"/>
+            <a:off x="4754880" y="2578608"/>
             <a:ext cx="3657600" cy="274320"/>
           </a:xfrm>
           <a:prstGeom prst="rect">
@@ -5921,6 +5996,7 @@
               </a:defRPr>
             </a:pPr>
             <a:r>
+              <a:rPr/>
               <a:t>n=157</a:t>
             </a:r>
           </a:p>
@@ -5965,7 +6041,9 @@
           <a:bodyPr rtlCol="0" anchor="ctr"/>
           <a:lstStyle/>
           <a:p>
-            <a:pPr algn="ctr"/>
+            <a:pPr algn="ctr">
+              <a:defRPr/>
+            </a:pPr>
           </a:p>
         </p:txBody>
       </p:sp>
@@ -6010,7 +6088,9 @@
           <a:bodyPr rtlCol="0" anchor="ctr"/>
           <a:lstStyle/>
           <a:p>
-            <a:pPr algn="ctr"/>
+            <a:pPr algn="ctr">
+              <a:defRPr/>
+            </a:pPr>
           </a:p>
         </p:txBody>
       </p:sp>
@@ -6045,10 +6125,12 @@
               </a:defRPr>
             </a:pPr>
             <a:r>
+              <a:rPr/>
               <a:t>「ACPは概ね機能する」——しかし5人に1人は希望と異なる場所で死を迎えている。</a:t>
             </a:r>
             <a:br/>
             <a:r>
+              <a:rPr/>
               <a:t>最も手厚い支援を受けた集団での数値であることに注目。</a:t>
             </a:r>
           </a:p>
@@ -6089,7 +6171,7 @@
         <p:spPr>
           <a:xfrm>
             <a:off x="457200" y="274320"/>
-            <a:ext cx="8229600" cy="457200"/>
+            <a:ext cx="8229600" cy="482600"/>
           </a:xfrm>
           <a:prstGeom prst="rect">
             <a:avLst/>
@@ -6111,6 +6193,7 @@
               </a:defRPr>
             </a:pPr>
             <a:r>
+              <a:rPr/>
               <a:t>国際メタアナリシスとの比較</a:t>
             </a:r>
           </a:p>
@@ -6155,7 +6238,9 @@
           <a:bodyPr rtlCol="0" anchor="ctr"/>
           <a:lstStyle/>
           <a:p>
-            <a:pPr algn="ctr"/>
+            <a:pPr algn="ctr">
+              <a:defRPr/>
+            </a:pPr>
           </a:p>
         </p:txBody>
       </p:sp>
@@ -6669,7 +6754,9 @@
           <a:bodyPr rtlCol="0" anchor="ctr"/>
           <a:lstStyle/>
           <a:p>
-            <a:pPr algn="ctr"/>
+            <a:pPr algn="ctr">
+              <a:defRPr/>
+            </a:pPr>
           </a:p>
         </p:txBody>
       </p:sp>
@@ -6714,7 +6801,9 @@
           <a:bodyPr rtlCol="0" anchor="ctr"/>
           <a:lstStyle/>
           <a:p>
-            <a:pPr algn="ctr"/>
+            <a:pPr algn="ctr">
+              <a:defRPr/>
+            </a:pPr>
           </a:p>
         </p:txBody>
       </p:sp>
@@ -6749,10 +6838,12 @@
               </a:defRPr>
             </a:pPr>
             <a:r>
+              <a:rPr/>
               <a:t>上位の理由: 緩和ケア病棟を経由 → 専門的ACPの実施率が高い母集団。</a:t>
             </a:r>
             <a:br/>
             <a:r>
+              <a:rPr/>
               <a:t>一般的な在宅療養患者ではさらに高い不一致率が想定される。</a:t>
             </a:r>
           </a:p>
@@ -6815,6 +6906,7 @@
               </a:defRPr>
             </a:pPr>
             <a:r>
+              <a:rPr/>
               <a:t>なぜ不一致が起きるのか — 構造的要因の分析</a:t>
             </a:r>
           </a:p>
@@ -6859,7 +6951,9 @@
           <a:bodyPr rtlCol="0" anchor="ctr"/>
           <a:lstStyle/>
           <a:p>
-            <a:pPr algn="ctr"/>
+            <a:pPr algn="ctr">
+              <a:defRPr/>
+            </a:pPr>
           </a:p>
         </p:txBody>
       </p:sp>
@@ -6904,7 +6998,9 @@
           <a:bodyPr rtlCol="0" anchor="ctr"/>
           <a:lstStyle/>
           <a:p>
-            <a:pPr algn="ctr"/>
+            <a:pPr algn="ctr">
+              <a:defRPr/>
+            </a:pPr>
           </a:p>
         </p:txBody>
       </p:sp>
@@ -6939,6 +7035,7 @@
               </a:defRPr>
             </a:pPr>
             <a:r>
+              <a:rPr/>
               <a:t>病棟方針 → 自宅看取り（22例）</a:t>
             </a:r>
           </a:p>
@@ -6975,14 +7072,17 @@
               </a:defRPr>
             </a:pPr>
             <a:r>
+              <a:rPr/>
               <a:t>ポジティブな変更</a:t>
             </a:r>
             <a:br/>
             <a:r>
+              <a:rPr/>
               <a:t>在宅対応の医師・看護師が見つかり、</a:t>
             </a:r>
             <a:br/>
             <a:r>
+              <a:rPr/>
               <a:t>より本人の希望に近い方向へ</a:t>
             </a:r>
           </a:p>
@@ -7029,7 +7129,9 @@
           <a:bodyPr rtlCol="0" anchor="ctr"/>
           <a:lstStyle/>
           <a:p>
-            <a:pPr algn="ctr"/>
+            <a:pPr algn="ctr">
+              <a:defRPr/>
+            </a:pPr>
           </a:p>
         </p:txBody>
       </p:sp>
@@ -7064,6 +7166,7 @@
               </a:defRPr>
             </a:pPr>
             <a:r>
+              <a:rPr/>
               <a:t>自宅方針 → 病棟看取り（11例）</a:t>
             </a:r>
           </a:p>
@@ -7100,14 +7203,17 @@
               </a:defRPr>
             </a:pPr>
             <a:r>
+              <a:rPr/>
               <a:t>ネガティブな変更</a:t>
             </a:r>
             <a:br/>
             <a:r>
+              <a:rPr/>
               <a:t>自宅での痛み管理が不十分で、</a:t>
             </a:r>
             <a:br/>
             <a:r>
+              <a:rPr/>
               <a:t>在宅医療の質的限界が原因</a:t>
             </a:r>
           </a:p>
@@ -7154,7 +7260,9 @@
           <a:bodyPr rtlCol="0" anchor="ctr"/>
           <a:lstStyle/>
           <a:p>
-            <a:pPr algn="ctr"/>
+            <a:pPr algn="ctr">
+              <a:defRPr/>
+            </a:pPr>
           </a:p>
         </p:txBody>
       </p:sp>
@@ -7167,7 +7275,7 @@
         <p:spPr>
           <a:xfrm>
             <a:off x="365760" y="2514600"/>
-            <a:ext cx="2560320" cy="320040"/>
+            <a:ext cx="2560320" cy="340360"/>
           </a:xfrm>
           <a:prstGeom prst="rect">
             <a:avLst/>
@@ -7189,6 +7297,7 @@
               </a:defRPr>
             </a:pPr>
             <a:r>
+              <a:rPr/>
               <a:t>医師偏在</a:t>
             </a:r>
           </a:p>
@@ -7225,14 +7334,17 @@
               </a:defRPr>
             </a:pPr>
             <a:r>
+              <a:rPr/>
               <a:t>2040年に約170自治体で</a:t>
             </a:r>
             <a:br/>
             <a:r>
+              <a:rPr/>
               <a:t>内科診療所ゼロの推計</a:t>
             </a:r>
             <a:br/>
             <a:r>
+              <a:rPr/>
               <a:t>24時間対応の物理的困難</a:t>
             </a:r>
           </a:p>
@@ -7279,7 +7391,9 @@
           <a:bodyPr rtlCol="0" anchor="ctr"/>
           <a:lstStyle/>
           <a:p>
-            <a:pPr algn="ctr"/>
+            <a:pPr algn="ctr">
+              <a:defRPr/>
+            </a:pPr>
           </a:p>
         </p:txBody>
       </p:sp>
@@ -7292,7 +7406,7 @@
         <p:spPr>
           <a:xfrm>
             <a:off x="3291840" y="2514600"/>
-            <a:ext cx="2560320" cy="320040"/>
+            <a:ext cx="2560320" cy="340360"/>
           </a:xfrm>
           <a:prstGeom prst="rect">
             <a:avLst/>
@@ -7314,6 +7428,7 @@
               </a:defRPr>
             </a:pPr>
             <a:r>
+              <a:rPr/>
               <a:t>痛み管理格差</a:t>
             </a:r>
           </a:p>
@@ -7350,14 +7465,17 @@
               </a:defRPr>
             </a:pPr>
             <a:r>
+              <a:rPr/>
               <a:t>在宅ではオピオイド持続皮下注等</a:t>
             </a:r>
             <a:br/>
             <a:r>
+              <a:rPr/>
               <a:t>の専門スキル不足</a:t>
             </a:r>
             <a:br/>
             <a:r>
+              <a:rPr/>
               <a:t>家族の介護負担の限界</a:t>
             </a:r>
           </a:p>
@@ -7404,7 +7522,9 @@
           <a:bodyPr rtlCol="0" anchor="ctr"/>
           <a:lstStyle/>
           <a:p>
-            <a:pPr algn="ctr"/>
+            <a:pPr algn="ctr">
+              <a:defRPr/>
+            </a:pPr>
           </a:p>
         </p:txBody>
       </p:sp>
@@ -7417,7 +7537,7 @@
         <p:spPr>
           <a:xfrm>
             <a:off x="6217920" y="2514600"/>
-            <a:ext cx="2560320" cy="320040"/>
+            <a:ext cx="2560320" cy="340360"/>
           </a:xfrm>
           <a:prstGeom prst="rect">
             <a:avLst/>
@@ -7439,6 +7559,7 @@
               </a:defRPr>
             </a:pPr>
             <a:r>
+              <a:rPr/>
               <a:t>教育格差</a:t>
             </a:r>
           </a:p>
@@ -7475,14 +7596,17 @@
               </a:defRPr>
             </a:pPr>
             <a:r>
+              <a:rPr/>
               <a:t>介護職向け緩和ケア教育</a:t>
             </a:r>
             <a:br/>
             <a:r>
+              <a:rPr/>
               <a:t>は約10%のみ</a:t>
             </a:r>
             <a:br/>
             <a:r>
+              <a:rPr/>
               <a:t>アウトリーチ活動9.3%</a:t>
             </a:r>
           </a:p>
@@ -7545,6 +7669,7 @@
               </a:defRPr>
             </a:pPr>
             <a:r>
+              <a:rPr/>
               <a:t>ケース:「自宅で最期まで」が叶わなかったAさん</a:t>
             </a:r>
           </a:p>
@@ -7589,7 +7714,9 @@
           <a:bodyPr rtlCol="0" anchor="ctr"/>
           <a:lstStyle/>
           <a:p>
-            <a:pPr algn="ctr"/>
+            <a:pPr algn="ctr">
+              <a:defRPr/>
+            </a:pPr>
           </a:p>
         </p:txBody>
       </p:sp>
@@ -7632,7 +7759,9 @@
           <a:bodyPr rtlCol="0" anchor="ctr"/>
           <a:lstStyle/>
           <a:p>
-            <a:pPr algn="ctr"/>
+            <a:pPr algn="ctr">
+              <a:defRPr/>
+            </a:pPr>
           </a:p>
         </p:txBody>
       </p:sp>
@@ -7667,14 +7796,17 @@
               </a:defRPr>
             </a:pPr>
             <a:r>
+              <a:rPr/>
               <a:t>70代男性、進行膵がん。緩和ケア病棟で症状安定後、ACPで「自宅で最期を」と合意し退院。</a:t>
             </a:r>
             <a:br/>
             <a:r>
+              <a:rPr/>
               <a:t>退院2週間後、夜間の突然の激しい腹痛。妻がパニックで119番通報。</a:t>
             </a:r>
             <a:br/>
             <a:r>
+              <a:rPr/>
               <a:t>救急搬送 → 緩和ケア病棟に再入院 → 5日後に病棟で死亡。</a:t>
             </a:r>
           </a:p>
@@ -7689,7 +7821,7 @@
         <p:spPr>
           <a:xfrm>
             <a:off x="457200" y="2560320"/>
-            <a:ext cx="8229600" cy="365760"/>
+            <a:ext cx="8229600" cy="375920"/>
           </a:xfrm>
           <a:prstGeom prst="rect">
             <a:avLst/>
@@ -7711,6 +7843,7 @@
               </a:defRPr>
             </a:pPr>
             <a:r>
+              <a:rPr/>
               <a:t>ディスカッション（ペアまたは3人グループ、3分）</a:t>
             </a:r>
           </a:p>
@@ -7747,6 +7880,7 @@
               </a:defRPr>
             </a:pPr>
             <a:r>
+              <a:rPr/>
               <a:t>1. このケースで不一致を防げたポイントはどこか？</a:t>
             </a:r>
           </a:p>
@@ -7783,6 +7917,7 @@
               </a:defRPr>
             </a:pPr>
             <a:r>
+              <a:rPr/>
               <a:t>2. 退院前に、どのような「仕組み」があればよかったか？</a:t>
             </a:r>
           </a:p>
@@ -7819,6 +7954,7 @@
               </a:defRPr>
             </a:pPr>
             <a:r>
+              <a:rPr/>
               <a:t>3. 家族（妻）にどのような事前準備ができたか？</a:t>
             </a:r>
           </a:p>
@@ -7881,6 +8017,7 @@
               </a:defRPr>
             </a:pPr>
             <a:r>
+              <a:rPr/>
               <a:t>Phase 1-4のトランジション設計で何ができたか？</a:t>
             </a:r>
           </a:p>
@@ -7925,7 +8062,9 @@
           <a:bodyPr rtlCol="0" anchor="ctr"/>
           <a:lstStyle/>
           <a:p>
-            <a:pPr algn="ctr"/>
+            <a:pPr algn="ctr">
+              <a:defRPr/>
+            </a:pPr>
           </a:p>
         </p:txBody>
       </p:sp>
@@ -8365,7 +8504,9 @@
           <a:bodyPr rtlCol="0" anchor="ctr"/>
           <a:lstStyle/>
           <a:p>
-            <a:pPr algn="ctr"/>
+            <a:pPr algn="ctr">
+              <a:defRPr/>
+            </a:pPr>
           </a:p>
         </p:txBody>
       </p:sp>
@@ -8410,7 +8551,9 @@
           <a:bodyPr rtlCol="0" anchor="ctr"/>
           <a:lstStyle/>
           <a:p>
-            <a:pPr algn="ctr"/>
+            <a:pPr algn="ctr">
+              <a:defRPr/>
+            </a:pPr>
           </a:p>
         </p:txBody>
       </p:sp>
@@ -8445,6 +8588,7 @@
               </a:defRPr>
             </a:pPr>
             <a:r>
+              <a:rPr/>
               <a:t>ACPは「一度やれば終わり」ではなく、トランジションごとに再確認・再調整するプロセス。</a:t>
             </a:r>
           </a:p>
